--- a/classes/parte-14-grc-riesgo-y-cumplimiento/285-auditoria-de-seguridad/clase-285-presentacion.pptx
+++ b/classes/parte-14-grc-riesgo-y-cumplimiento/285-auditoria-de-seguridad/clase-285-presentacion.pptx
@@ -21,6 +21,7 @@
     <p:sldId id="269" r:id="rId20"/>
     <p:sldId id="270" r:id="rId21"/>
     <p:sldId id="271" r:id="rId22"/>
+    <p:sldId id="272" r:id="rId23"/>
   </p:sldIdLst>
   <p:sldSz cx="9144000" cy="6858000" type="screen4x3"/>
   <p:notesSz cx="6858000" cy="9144000"/>
@@ -3255,6 +3256,21 @@
                   <a:srgbClr val="22282E"/>
                 </a:solidFill>
               </a:rPr>
+              <a:t>•  Todos los usuarios, eventos, transferencias y documentos son ficticios.</a:t>
+            </a:r>
+          </a:p>
+          <a:p>
+            <a:pPr>
+              <a:spcAft>
+                <a:spcPts val="600"/>
+              </a:spcAft>
+            </a:pPr>
+            <a:r>
+              <a:rPr sz="1500">
+                <a:solidFill>
+                  <a:srgbClr val="22282E"/>
+                </a:solidFill>
+              </a:rPr>
               <a:t>•  Alcance y criterio: define el alcance ("gestión de accesos a la plataforma de e-commerce") y el criterio (la política de la clase 282 y el control ISO 27001 A.5.15/A.8.2).</a:t>
             </a:r>
           </a:p>
@@ -3316,21 +3332,6 @@
                 </a:solidFill>
               </a:rPr>
               <a:t>•  Registro de hallazgos: documenta al menos 2 hallazgos (p. ej. "3 de 10 cuentas sin MFA"; "1 ex-empleado con acceso activo"), clasifícalos en mayor/menor y anota la evidencia.</a:t>
-            </a:r>
-          </a:p>
-          <a:p>
-            <a:pPr>
-              <a:spcAft>
-                <a:spcPts val="600"/>
-              </a:spcAft>
-            </a:pPr>
-            <a:r>
-              <a:rPr sz="1500">
-                <a:solidFill>
-                  <a:srgbClr val="22282E"/>
-                </a:solidFill>
-              </a:rPr>
-              <a:t>•  CAPA: para cada hallazgo redacta la acción correctiva, la causa raíz y la fecha de cierre.</a:t>
             </a:r>
           </a:p>
         </p:txBody>
@@ -3497,6 +3498,21 @@
               <a:t>•  Redacta una CAPA para el hallazgo "logs del SIEM se retienen 7 días en lugar de 90".</a:t>
             </a:r>
           </a:p>
+          <a:p>
+            <a:pPr>
+              <a:spcAft>
+                <a:spcPts val="600"/>
+              </a:spcAft>
+            </a:pPr>
+            <a:r>
+              <a:rPr sz="1500">
+                <a:solidFill>
+                  <a:srgbClr val="22282E"/>
+                </a:solidFill>
+              </a:rPr>
+              <a:t>•  Compara Madoff y AC Inversions sin equipararlos: identifica una lección común sobre evidencia</a:t>
+            </a:r>
+          </a:p>
         </p:txBody>
       </p:sp>
     </p:spTree>
@@ -3601,6 +3617,51 @@
               <a:t>•  Criterio de aceptación: cada hallazgo cita evidencia y criterio incumplido, cada CAPA identifica causa raíz y fecha de cierre, y el informe distingue hallazgos mayores de menores con recomendaciones…</a:t>
             </a:r>
           </a:p>
+          <a:p>
+            <a:pPr>
+              <a:spcAft>
+                <a:spcPts val="600"/>
+              </a:spcAft>
+            </a:pPr>
+            <a:r>
+              <a:rPr sz="1500">
+                <a:solidFill>
+                  <a:srgbClr val="22282E"/>
+                </a:solidFill>
+              </a:rPr>
+              <a:t>•  La muestra ampliada debe ser reproducible, señalar las tres anomalías sembradas y declarar al menos</a:t>
+            </a:r>
+          </a:p>
+          <a:p>
+            <a:pPr>
+              <a:spcAft>
+                <a:spcPts val="600"/>
+              </a:spcAft>
+            </a:pPr>
+            <a:r>
+              <a:rPr sz="1500">
+                <a:solidFill>
+                  <a:srgbClr val="22282E"/>
+                </a:solidFill>
+              </a:rPr>
+              <a:t>•  cuatro conclusiones no soportadas: fraude, intención, identidad humana y autenticidad de origen por</a:t>
+            </a:r>
+          </a:p>
+          <a:p>
+            <a:pPr>
+              <a:spcAft>
+                <a:spcPts val="600"/>
+              </a:spcAft>
+            </a:pPr>
+            <a:r>
+              <a:rPr sz="1500">
+                <a:solidFill>
+                  <a:srgbClr val="22282E"/>
+                </a:solidFill>
+              </a:rPr>
+              <a:t>•  el solo hecho de disponer de un hash.</a:t>
+            </a:r>
+          </a:p>
         </p:txBody>
       </p:sp>
     </p:spTree>
@@ -3750,6 +3811,36 @@
               <a:t>•  Confundir SOC 2 Type I con Type II — Type I es diseño puntual; Type II prueba eficacia en el tiempo</a:t>
             </a:r>
           </a:p>
+          <a:p>
+            <a:pPr>
+              <a:spcAft>
+                <a:spcPts val="600"/>
+              </a:spcAft>
+            </a:pPr>
+            <a:r>
+              <a:rPr sz="1500">
+                <a:solidFill>
+                  <a:srgbClr val="22282E"/>
+                </a:solidFill>
+              </a:rPr>
+              <a:t>•  Pedir una confirmación «externa» al auditado — El canal sigue bajo control de la fuente examinada; solicita y recibe directamente del tercero</a:t>
+            </a:r>
+          </a:p>
+          <a:p>
+            <a:pPr>
+              <a:spcAft>
+                <a:spcPts val="600"/>
+              </a:spcAft>
+            </a:pPr>
+            <a:r>
+              <a:rPr sz="1500">
+                <a:solidFill>
+                  <a:srgbClr val="22282E"/>
+                </a:solidFill>
+              </a:rPr>
+              <a:t>•  Una conciliación cuadra y se da por auténtica — Cuadrar prueba consistencia entre datos seleccionados, no procedencia, completitud ni legitimidad</a:t>
+            </a:r>
+          </a:p>
         </p:txBody>
       </p:sp>
     </p:spTree>
@@ -4078,6 +4169,36 @@
               <a:t>•  NIST SP 800-53A — Assessing Security Controls. &lt;https://csrc.nist.gov/pubs/sp/800/53/a/r5/final&gt;</a:t>
             </a:r>
           </a:p>
+          <a:p>
+            <a:pPr>
+              <a:spcAft>
+                <a:spcPts val="600"/>
+              </a:spcAft>
+            </a:pPr>
+            <a:r>
+              <a:rPr sz="1500">
+                <a:solidFill>
+                  <a:srgbClr val="22282E"/>
+                </a:solidFill>
+              </a:rPr>
+              <a:t>•  SEC Office of Inspector General — Investigation of Failure of the SEC to Uncover Bernard Madoff's Ponzi Scheme (2009); respalda el fallo de confirmación independiente y los límites de las revisiones.…</a:t>
+            </a:r>
+          </a:p>
+          <a:p>
+            <a:pPr>
+              <a:spcAft>
+                <a:spcPts val="600"/>
+              </a:spcAft>
+            </a:pPr>
+            <a:r>
+              <a:rPr sz="1500">
+                <a:solidFill>
+                  <a:srgbClr val="22282E"/>
+                </a:solidFill>
+              </a:rPr>
+              <a:t>•  U.S. Securities and Exchange Commission — declaración sobre reglas de custodia posteriores a Madoff; respalda la función de custodio independiente, estados directos y exámenes sorpresa.…</a:t>
+            </a:r>
+          </a:p>
         </p:txBody>
       </p:sp>
     </p:spTree>
@@ -4089,6 +4210,140 @@
 </file>
 
 <file path=ppt/slides/slide16.xml><?xml version="1.0" encoding="utf-8"?>
+<p:sld xmlns:a="http://schemas.openxmlformats.org/drawingml/2006/main" xmlns:p="http://schemas.openxmlformats.org/presentationml/2006/main" xmlns:r="http://schemas.openxmlformats.org/officeDocument/2006/relationships">
+  <p:cSld>
+    <p:spTree>
+      <p:nvGrpSpPr>
+        <p:cNvPr id="1" name=""/>
+        <p:cNvGrpSpPr/>
+        <p:nvPr/>
+      </p:nvGrpSpPr>
+      <p:grpSpPr/>
+      <p:sp>
+        <p:nvSpPr>
+          <p:cNvPr id="2" name="TextBox 1"/>
+          <p:cNvSpPr txBox="1"/>
+          <p:nvPr/>
+        </p:nvSpPr>
+        <p:spPr>
+          <a:xfrm>
+            <a:off x="457200" y="320040"/>
+            <a:ext cx="8229600" cy="822960"/>
+          </a:xfrm>
+          <a:prstGeom prst="rect">
+            <a:avLst/>
+          </a:prstGeom>
+          <a:noFill/>
+        </p:spPr>
+        <p:txBody>
+          <a:bodyPr wrap="square">
+            <a:spAutoFit/>
+          </a:bodyPr>
+          <a:lstStyle/>
+          <a:p>
+            <a:r>
+              <a:rPr sz="2600" b="1">
+                <a:solidFill>
+                  <a:srgbClr val="0B3D2E"/>
+                </a:solidFill>
+              </a:rPr>
+              <a:t>🔬 Aplicación transversal</a:t>
+            </a:r>
+          </a:p>
+        </p:txBody>
+      </p:sp>
+      <p:sp>
+        <p:nvSpPr>
+          <p:cNvPr id="3" name="TextBox 2"/>
+          <p:cNvSpPr txBox="1"/>
+          <p:nvPr/>
+        </p:nvSpPr>
+        <p:spPr>
+          <a:xfrm>
+            <a:off x="457200" y="1280160"/>
+            <a:ext cx="8229600" cy="4937760"/>
+          </a:xfrm>
+          <a:prstGeom prst="rect">
+            <a:avLst/>
+          </a:prstGeom>
+          <a:noFill/>
+        </p:spPr>
+        <p:txBody>
+          <a:bodyPr wrap="square">
+            <a:spAutoFit/>
+          </a:bodyPr>
+          <a:lstStyle/>
+          <a:p>
+            <a:pPr>
+              <a:spcAft>
+                <a:spcPts val="600"/>
+              </a:spcAft>
+            </a:pPr>
+            <a:r>
+              <a:rPr sz="1500">
+                <a:solidFill>
+                  <a:srgbClr val="22282E"/>
+                </a:solidFill>
+              </a:rPr>
+              <a:t>•  Audita diseño y operación de la matriz maker-checker del</a:t>
+            </a:r>
+          </a:p>
+          <a:p>
+            <a:pPr>
+              <a:spcAft>
+                <a:spcPts val="600"/>
+              </a:spcAft>
+            </a:pPr>
+            <a:r>
+              <a:rPr sz="1500">
+                <a:solidFill>
+                  <a:srgbClr val="22282E"/>
+                </a:solidFill>
+              </a:rPr>
+              <a:t>•  caso de custodia de activos digitales.</a:t>
+            </a:r>
+          </a:p>
+          <a:p>
+            <a:pPr>
+              <a:spcAft>
+                <a:spcPts val="600"/>
+              </a:spcAft>
+            </a:pPr>
+            <a:r>
+              <a:rPr sz="1500">
+                <a:solidFill>
+                  <a:srgbClr val="22282E"/>
+                </a:solidFill>
+              </a:rPr>
+              <a:t>•  No aceptes capturas de la UI como única prueba: ensaya permisos negativos por API,</a:t>
+            </a:r>
+          </a:p>
+          <a:p>
+            <a:pPr>
+              <a:spcAft>
+                <a:spcPts val="600"/>
+              </a:spcAft>
+            </a:pPr>
+            <a:r>
+              <a:rPr sz="1500">
+                <a:solidFill>
+                  <a:srgbClr val="22282E"/>
+                </a:solidFill>
+              </a:rPr>
+              <a:t>•  revisa sesiones PAM y muestrea retiros contra aprobación, firma, asiento y TXID.</a:t>
+            </a:r>
+          </a:p>
+        </p:txBody>
+      </p:sp>
+    </p:spTree>
+  </p:cSld>
+  <p:clrMapOvr>
+    <a:masterClrMapping/>
+  </p:clrMapOvr>
+</p:sld>
+</file>
+
+<file path=ppt/slides/slide17.xml><?xml version="1.0" encoding="utf-8"?>
 <p:sld xmlns:a="http://schemas.openxmlformats.org/drawingml/2006/main" xmlns:p="http://schemas.openxmlformats.org/presentationml/2006/main" xmlns:r="http://schemas.openxmlformats.org/officeDocument/2006/relationships">
   <p:cSld>
     <p:spTree>
@@ -4406,6 +4661,21 @@
               <a:t>•  Gestionar hallazgos, no conformidades y planes de acción correctiva.</a:t>
             </a:r>
           </a:p>
+          <a:p>
+            <a:pPr>
+              <a:spcAft>
+                <a:spcPts val="600"/>
+              </a:spcAft>
+            </a:pPr>
+            <a:r>
+              <a:rPr sz="1500">
+                <a:solidFill>
+                  <a:srgbClr val="22282E"/>
+                </a:solidFill>
+              </a:rPr>
+              <a:t>•  Contrastar registros internos con confirmaciones externas y redactar conclusiones proporcionales al estado de la evidencia.</a:t>
+            </a:r>
+          </a:p>
         </p:txBody>
       </p:sp>
     </p:spTree>
@@ -4689,6 +4959,81 @@
               <a:t>•  Cinco tickets cerrados no demuestran el año completo. El auditor justifica población, selección y limitación antes de concluir.</a:t>
             </a:r>
           </a:p>
+          <a:p>
+            <a:pPr>
+              <a:spcAft>
+                <a:spcPts val="600"/>
+              </a:spcAft>
+            </a:pPr>
+            <a:r>
+              <a:rPr sz="1500">
+                <a:solidFill>
+                  <a:srgbClr val="22282E"/>
+                </a:solidFill>
+              </a:rPr>
+              <a:t>•  El informe del Inspector General de la SEC sobre la incapacidad del organismo para descubrir el</a:t>
+            </a:r>
+          </a:p>
+          <a:p>
+            <a:pPr>
+              <a:spcAft>
+                <a:spcPts val="600"/>
+              </a:spcAft>
+            </a:pPr>
+            <a:r>
+              <a:rPr sz="1500">
+                <a:solidFill>
+                  <a:srgbClr val="22282E"/>
+                </a:solidFill>
+              </a:rPr>
+              <a:t>•  esquema de Bernard Madoff documentó que se pidieron registros de un tercero independiente, pero se</a:t>
+            </a:r>
+          </a:p>
+          <a:p>
+            <a:pPr>
+              <a:spcAft>
+                <a:spcPts val="600"/>
+              </a:spcAft>
+            </a:pPr>
+            <a:r>
+              <a:rPr sz="1500">
+                <a:solidFill>
+                  <a:srgbClr val="22282E"/>
+                </a:solidFill>
+              </a:rPr>
+              <a:t>•  obtuvieron copias a través del propio Madoff. Ese recorrido destruye la independencia que se buscaba:</a:t>
+            </a:r>
+          </a:p>
+          <a:p>
+            <a:pPr>
+              <a:spcAft>
+                <a:spcPts val="600"/>
+              </a:spcAft>
+            </a:pPr>
+            <a:r>
+              <a:rPr sz="1500">
+                <a:solidFill>
+                  <a:srgbClr val="22282E"/>
+                </a:solidFill>
+              </a:rPr>
+              <a:t>•  el documento puede parecer externo mientras su canal de adquisición sigue controlado por el sujeto</a:t>
+            </a:r>
+          </a:p>
+          <a:p>
+            <a:pPr>
+              <a:spcAft>
+                <a:spcPts val="600"/>
+              </a:spcAft>
+            </a:pPr>
+            <a:r>
+              <a:rPr sz="1500">
+                <a:solidFill>
+                  <a:srgbClr val="22282E"/>
+                </a:solidFill>
+              </a:rPr>
+              <a:t>•  examinado. La respuesta de control no es «confiar más en la captura», sino confirmar directamente</a:t>
+            </a:r>
+          </a:p>
         </p:txBody>
       </p:sp>
     </p:spTree>
@@ -4821,6 +5166,36 @@
                 </a:solidFill>
               </a:rPr>
               <a:t>•  Hallazgo — Diferencia sustentada entre criterio y condición.</a:t>
+            </a:r>
+          </a:p>
+          <a:p>
+            <a:pPr>
+              <a:spcAft>
+                <a:spcPts val="600"/>
+              </a:spcAft>
+            </a:pPr>
+            <a:r>
+              <a:rPr sz="1500">
+                <a:solidFill>
+                  <a:srgbClr val="22282E"/>
+                </a:solidFill>
+              </a:rPr>
+              <a:t>•  Confirmación externa — Evidencia solicitada y recibida directamente de una fuente independiente.</a:t>
+            </a:r>
+          </a:p>
+          <a:p>
+            <a:pPr>
+              <a:spcAft>
+                <a:spcPts val="600"/>
+              </a:spcAft>
+            </a:pPr>
+            <a:r>
+              <a:rPr sz="1500">
+                <a:solidFill>
+                  <a:srgbClr val="22282E"/>
+                </a:solidFill>
+              </a:rPr>
+              <a:t>•  Procedencia — Historia del origen, adquisición y transformaciones de una evidencia.</a:t>
             </a:r>
           </a:p>
         </p:txBody>
